--- a/ゲーム概要書V2_252_長﨑柊磨.pptx
+++ b/ゲーム概要書V2_252_長﨑柊磨.pptx
@@ -7147,7 +7147,7 @@
                 <a:latin typeface="メイリオ" panose="020B0604030504040204" pitchFamily="50" charset="-128"/>
                 <a:ea typeface="メイリオ" panose="020B0604030504040204" pitchFamily="50" charset="-128"/>
               </a:rPr>
-              <a:t>個人目標設定（柳伊吹）</a:t>
+              <a:t>個人目標設定（山崎佑斗）</a:t>
             </a:r>
           </a:p>
         </p:txBody>
@@ -7921,7 +7921,7 @@
                 <a:latin typeface="メイリオ" panose="020B0604030504040204" pitchFamily="50" charset="-128"/>
                 <a:ea typeface="メイリオ" panose="020B0604030504040204" pitchFamily="50" charset="-128"/>
               </a:rPr>
-              <a:t>個人目標設定（山崎佑斗）</a:t>
+              <a:t>個人目標設定（柳伊吹）</a:t>
             </a:r>
           </a:p>
         </p:txBody>
@@ -8291,35 +8291,6 @@
               </a:rPr>
               <a:t>＜こだわりたいポイント＞</a:t>
             </a:r>
-            <a:endParaRPr kumimoji="1" lang="en-US" altLang="ja-JP" sz="2400" dirty="0">
-              <a:solidFill>
-                <a:srgbClr val="000000"/>
-              </a:solidFill>
-              <a:latin typeface="HGP創英角ｺﾞｼｯｸUB" panose="020B0900000000000000" pitchFamily="50" charset="-128"/>
-              <a:ea typeface="HGP創英角ｺﾞｼｯｸUB" panose="020B0900000000000000" pitchFamily="50" charset="-128"/>
-              <a:cs typeface="メイリオ" pitchFamily="50" charset="-128"/>
-            </a:endParaRPr>
-          </a:p>
-          <a:p>
-            <a:pPr defTabSz="914400" fontAlgn="base">
-              <a:spcBef>
-                <a:spcPct val="0"/>
-              </a:spcBef>
-              <a:spcAft>
-                <a:spcPct val="0"/>
-              </a:spcAft>
-            </a:pPr>
-            <a:r>
-              <a:rPr kumimoji="1" lang="ja-JP" altLang="en-US" sz="2400" dirty="0">
-                <a:solidFill>
-                  <a:srgbClr val="000000"/>
-                </a:solidFill>
-                <a:latin typeface="HGP創英角ｺﾞｼｯｸUB" panose="020B0900000000000000" pitchFamily="50" charset="-128"/>
-                <a:ea typeface="HGP創英角ｺﾞｼｯｸUB" panose="020B0900000000000000" pitchFamily="50" charset="-128"/>
-                <a:cs typeface="メイリオ" pitchFamily="50" charset="-128"/>
-              </a:rPr>
-              <a:t>・科学者の通ったところが光る床がある</a:t>
-            </a:r>
             <a:br>
               <a:rPr kumimoji="1" lang="en-US" altLang="ja-JP" sz="2400" dirty="0">
                 <a:solidFill>
@@ -8367,45 +8338,6 @@
               <a:ea typeface="HGP創英角ｺﾞｼｯｸUB" panose="020B0900000000000000" pitchFamily="50" charset="-128"/>
               <a:cs typeface="メイリオ" pitchFamily="50" charset="-128"/>
             </a:endParaRPr>
-          </a:p>
-          <a:p>
-            <a:pPr defTabSz="914400" fontAlgn="base">
-              <a:spcBef>
-                <a:spcPct val="0"/>
-              </a:spcBef>
-              <a:spcAft>
-                <a:spcPct val="0"/>
-              </a:spcAft>
-            </a:pPr>
-            <a:endParaRPr kumimoji="1" lang="en-US" altLang="ja-JP" sz="2400" dirty="0">
-              <a:solidFill>
-                <a:srgbClr val="000000"/>
-              </a:solidFill>
-              <a:latin typeface="HGP創英角ｺﾞｼｯｸUB" panose="020B0900000000000000" pitchFamily="50" charset="-128"/>
-              <a:ea typeface="HGP創英角ｺﾞｼｯｸUB" panose="020B0900000000000000" pitchFamily="50" charset="-128"/>
-              <a:cs typeface="メイリオ" pitchFamily="50" charset="-128"/>
-            </a:endParaRPr>
-          </a:p>
-          <a:p>
-            <a:pPr defTabSz="914400" fontAlgn="base">
-              <a:spcBef>
-                <a:spcPct val="0"/>
-              </a:spcBef>
-              <a:spcAft>
-                <a:spcPct val="0"/>
-              </a:spcAft>
-            </a:pPr>
-            <a:r>
-              <a:rPr kumimoji="1" lang="ja-JP" altLang="en-US" sz="2400" dirty="0">
-                <a:solidFill>
-                  <a:srgbClr val="000000"/>
-                </a:solidFill>
-                <a:latin typeface="HGP創英角ｺﾞｼｯｸUB" panose="020B0900000000000000" pitchFamily="50" charset="-128"/>
-                <a:ea typeface="HGP創英角ｺﾞｼｯｸUB" panose="020B0900000000000000" pitchFamily="50" charset="-128"/>
-                <a:cs typeface="メイリオ" pitchFamily="50" charset="-128"/>
-              </a:rPr>
-              <a:t>・その他のミニゲーム</a:t>
-            </a:r>
           </a:p>
         </p:txBody>
       </p:sp>
@@ -8541,84 +8473,6 @@
               <a:ea typeface="HGP創英角ｺﾞｼｯｸUB" panose="020B0900000000000000" pitchFamily="50" charset="-128"/>
               <a:cs typeface="メイリオ" pitchFamily="50" charset="-128"/>
             </a:endParaRPr>
-          </a:p>
-          <a:p>
-            <a:pPr defTabSz="914400" fontAlgn="base">
-              <a:spcBef>
-                <a:spcPct val="0"/>
-              </a:spcBef>
-              <a:spcAft>
-                <a:spcPct val="0"/>
-              </a:spcAft>
-            </a:pPr>
-            <a:br>
-              <a:rPr kumimoji="1" lang="en-US" altLang="ja-JP" sz="2400" dirty="0">
-                <a:solidFill>
-                  <a:srgbClr val="000000"/>
-                </a:solidFill>
-                <a:latin typeface="HGP創英角ｺﾞｼｯｸUB" panose="020B0900000000000000" pitchFamily="50" charset="-128"/>
-                <a:ea typeface="HGP創英角ｺﾞｼｯｸUB" panose="020B0900000000000000" pitchFamily="50" charset="-128"/>
-                <a:cs typeface="メイリオ" pitchFamily="50" charset="-128"/>
-              </a:rPr>
-            </a:br>
-            <a:r>
-              <a:rPr kumimoji="1" lang="ja-JP" altLang="en-US" sz="2400" dirty="0">
-                <a:solidFill>
-                  <a:srgbClr val="000000"/>
-                </a:solidFill>
-                <a:latin typeface="HGP創英角ｺﾞｼｯｸUB" panose="020B0900000000000000" pitchFamily="50" charset="-128"/>
-                <a:ea typeface="HGP創英角ｺﾞｼｯｸUB" panose="020B0900000000000000" pitchFamily="50" charset="-128"/>
-                <a:cs typeface="メイリオ" pitchFamily="50" charset="-128"/>
-              </a:rPr>
-              <a:t>・リファクタリング</a:t>
-            </a:r>
-            <a:endParaRPr kumimoji="1" lang="en-US" altLang="ja-JP" sz="2400" dirty="0">
-              <a:solidFill>
-                <a:srgbClr val="000000"/>
-              </a:solidFill>
-              <a:latin typeface="HGP創英角ｺﾞｼｯｸUB" panose="020B0900000000000000" pitchFamily="50" charset="-128"/>
-              <a:ea typeface="HGP創英角ｺﾞｼｯｸUB" panose="020B0900000000000000" pitchFamily="50" charset="-128"/>
-              <a:cs typeface="メイリオ" pitchFamily="50" charset="-128"/>
-            </a:endParaRPr>
-          </a:p>
-          <a:p>
-            <a:pPr defTabSz="914400" fontAlgn="base">
-              <a:spcBef>
-                <a:spcPct val="0"/>
-              </a:spcBef>
-              <a:spcAft>
-                <a:spcPct val="0"/>
-              </a:spcAft>
-            </a:pPr>
-            <a:endParaRPr kumimoji="1" lang="en-US" altLang="ja-JP" sz="2400" dirty="0">
-              <a:solidFill>
-                <a:srgbClr val="000000"/>
-              </a:solidFill>
-              <a:latin typeface="HGP創英角ｺﾞｼｯｸUB" panose="020B0900000000000000" pitchFamily="50" charset="-128"/>
-              <a:ea typeface="HGP創英角ｺﾞｼｯｸUB" panose="020B0900000000000000" pitchFamily="50" charset="-128"/>
-              <a:cs typeface="メイリオ" pitchFamily="50" charset="-128"/>
-            </a:endParaRPr>
-          </a:p>
-          <a:p>
-            <a:pPr defTabSz="914400" fontAlgn="base">
-              <a:spcBef>
-                <a:spcPct val="0"/>
-              </a:spcBef>
-              <a:spcAft>
-                <a:spcPct val="0"/>
-              </a:spcAft>
-            </a:pPr>
-            <a:r>
-              <a:rPr kumimoji="1" lang="ja-JP" altLang="en-US" sz="2400" dirty="0">
-                <a:solidFill>
-                  <a:srgbClr val="000000"/>
-                </a:solidFill>
-                <a:latin typeface="HGP創英角ｺﾞｼｯｸUB" panose="020B0900000000000000" pitchFamily="50" charset="-128"/>
-                <a:ea typeface="HGP創英角ｺﾞｼｯｸUB" panose="020B0900000000000000" pitchFamily="50" charset="-128"/>
-                <a:cs typeface="メイリオ" pitchFamily="50" charset="-128"/>
-              </a:rPr>
-              <a:t>・スマートポインタを使ったメモリ管理</a:t>
-            </a:r>
           </a:p>
         </p:txBody>
       </p:sp>
@@ -9485,12 +9339,14 @@
 </file>
 
 <file path=customXml/item1.xml><?xml version="1.0" encoding="utf-8"?>
-<?mso-contentType ?>
-<FormTemplates xmlns="http://schemas.microsoft.com/sharepoint/v3/contenttype/forms">
-  <Display>DocumentLibraryForm</Display>
-  <Edit>DocumentLibraryForm</Edit>
-  <New>DocumentLibraryForm</New>
-</FormTemplates>
+<p:properties xmlns:p="http://schemas.microsoft.com/office/2006/metadata/properties" xmlns:xsi="http://www.w3.org/2001/XMLSchema-instance" xmlns:pc="http://schemas.microsoft.com/office/infopath/2007/PartnerControls">
+  <documentManagement>
+    <TaxCatchAll xmlns="f9048785-d070-4c78-8f2f-ed2b48eb345c" xsi:nil="true"/>
+    <lcf76f155ced4ddcb4097134ff3c332f xmlns="02709b60-37ec-424b-b681-c6612ac7fe32">
+      <Terms xmlns="http://schemas.microsoft.com/office/infopath/2007/PartnerControls"/>
+    </lcf76f155ced4ddcb4097134ff3c332f>
+  </documentManagement>
+</p:properties>
 </file>
 
 <file path=customXml/item2.xml><?xml version="1.0" encoding="utf-8"?>
@@ -9729,20 +9585,29 @@
 </file>
 
 <file path=customXml/item3.xml><?xml version="1.0" encoding="utf-8"?>
-<p:properties xmlns:p="http://schemas.microsoft.com/office/2006/metadata/properties" xmlns:xsi="http://www.w3.org/2001/XMLSchema-instance" xmlns:pc="http://schemas.microsoft.com/office/infopath/2007/PartnerControls">
-  <documentManagement>
-    <TaxCatchAll xmlns="f9048785-d070-4c78-8f2f-ed2b48eb345c" xsi:nil="true"/>
-    <lcf76f155ced4ddcb4097134ff3c332f xmlns="02709b60-37ec-424b-b681-c6612ac7fe32">
-      <Terms xmlns="http://schemas.microsoft.com/office/infopath/2007/PartnerControls"/>
-    </lcf76f155ced4ddcb4097134ff3c332f>
-  </documentManagement>
-</p:properties>
+<?mso-contentType ?>
+<FormTemplates xmlns="http://schemas.microsoft.com/sharepoint/v3/contenttype/forms">
+  <Display>DocumentLibraryForm</Display>
+  <Edit>DocumentLibraryForm</Edit>
+  <New>DocumentLibraryForm</New>
+</FormTemplates>
 </file>
 
 <file path=customXml/itemProps1.xml><?xml version="1.0" encoding="utf-8"?>
-<ds:datastoreItem xmlns:ds="http://schemas.openxmlformats.org/officeDocument/2006/customXml" ds:itemID="{7548941E-71E2-4531-BC0F-EE0D630B2ABC}">
+<ds:datastoreItem xmlns:ds="http://schemas.openxmlformats.org/officeDocument/2006/customXml" ds:itemID="{049CE55E-098B-4E48-AF86-E65EA21E3ADA}">
   <ds:schemaRefs>
-    <ds:schemaRef ds:uri="http://schemas.microsoft.com/sharepoint/v3/contenttype/forms"/>
+    <ds:schemaRef ds:uri="0c73c1f5-50cd-4477-a315-44bef7b8a847"/>
+    <ds:schemaRef ds:uri="aaa52e1c-8772-4366-aa63-bf636c80ebd4"/>
+    <ds:schemaRef ds:uri="http://purl.org/dc/dcmitype/"/>
+    <ds:schemaRef ds:uri="http://purl.org/dc/elements/1.1/"/>
+    <ds:schemaRef ds:uri="http://purl.org/dc/terms/"/>
+    <ds:schemaRef ds:uri="http://schemas.microsoft.com/office/2006/documentManagement/types"/>
+    <ds:schemaRef ds:uri="http://schemas.microsoft.com/office/2006/metadata/properties"/>
+    <ds:schemaRef ds:uri="http://schemas.microsoft.com/office/infopath/2007/PartnerControls"/>
+    <ds:schemaRef ds:uri="http://schemas.openxmlformats.org/package/2006/metadata/core-properties"/>
+    <ds:schemaRef ds:uri="http://www.w3.org/XML/1998/namespace"/>
+    <ds:schemaRef ds:uri="f9048785-d070-4c78-8f2f-ed2b48eb345c"/>
+    <ds:schemaRef ds:uri="02709b60-37ec-424b-b681-c6612ac7fe32"/>
   </ds:schemaRefs>
 </ds:datastoreItem>
 </file>
@@ -9767,20 +9632,9 @@
 </file>
 
 <file path=customXml/itemProps3.xml><?xml version="1.0" encoding="utf-8"?>
-<ds:datastoreItem xmlns:ds="http://schemas.openxmlformats.org/officeDocument/2006/customXml" ds:itemID="{049CE55E-098B-4E48-AF86-E65EA21E3ADA}">
+<ds:datastoreItem xmlns:ds="http://schemas.openxmlformats.org/officeDocument/2006/customXml" ds:itemID="{7548941E-71E2-4531-BC0F-EE0D630B2ABC}">
   <ds:schemaRefs>
-    <ds:schemaRef ds:uri="0c73c1f5-50cd-4477-a315-44bef7b8a847"/>
-    <ds:schemaRef ds:uri="aaa52e1c-8772-4366-aa63-bf636c80ebd4"/>
-    <ds:schemaRef ds:uri="http://purl.org/dc/dcmitype/"/>
-    <ds:schemaRef ds:uri="http://purl.org/dc/elements/1.1/"/>
-    <ds:schemaRef ds:uri="http://purl.org/dc/terms/"/>
-    <ds:schemaRef ds:uri="http://schemas.microsoft.com/office/2006/documentManagement/types"/>
-    <ds:schemaRef ds:uri="http://schemas.microsoft.com/office/2006/metadata/properties"/>
-    <ds:schemaRef ds:uri="http://schemas.microsoft.com/office/infopath/2007/PartnerControls"/>
-    <ds:schemaRef ds:uri="http://schemas.openxmlformats.org/package/2006/metadata/core-properties"/>
-    <ds:schemaRef ds:uri="http://www.w3.org/XML/1998/namespace"/>
-    <ds:schemaRef ds:uri="f9048785-d070-4c78-8f2f-ed2b48eb345c"/>
-    <ds:schemaRef ds:uri="02709b60-37ec-424b-b681-c6612ac7fe32"/>
+    <ds:schemaRef ds:uri="http://schemas.microsoft.com/sharepoint/v3/contenttype/forms"/>
   </ds:schemaRefs>
 </ds:datastoreItem>
 </file>
--- a/ゲーム概要書V2_252_長﨑柊磨.pptx
+++ b/ゲーム概要書V2_252_長﨑柊磨.pptx
@@ -213,7 +213,7 @@
           <a:p>
             <a:fld id="{06CC78B4-D4EA-4E83-A43A-6FA5A0F7D0B3}" type="datetimeFigureOut">
               <a:rPr kumimoji="1" lang="ja-JP" altLang="en-US" smtClean="0"/>
-              <a:t>2026/4/24</a:t>
+              <a:t>2026/4/30</a:t>
             </a:fld>
             <a:endParaRPr kumimoji="1" lang="ja-JP" altLang="en-US"/>
           </a:p>
@@ -379,7 +379,7 @@
           <a:p>
             <a:fld id="{B3BB1B21-716A-4773-A420-9B5CE6E28AE2}" type="datetimeFigureOut">
               <a:rPr kumimoji="1" lang="ja-JP" altLang="en-US" smtClean="0"/>
-              <a:t>2026/4/24</a:t>
+              <a:t>2026/4/30</a:t>
             </a:fld>
             <a:endParaRPr kumimoji="1" lang="ja-JP" altLang="en-US"/>
           </a:p>
@@ -1230,7 +1230,7 @@
           <a:p>
             <a:fld id="{12326DE7-6362-45FB-80B6-F8887A987F74}" type="datetime1">
               <a:rPr kumimoji="1" lang="ja-JP" altLang="en-US" smtClean="0"/>
-              <a:t>2026/4/24</a:t>
+              <a:t>2026/4/30</a:t>
             </a:fld>
             <a:endParaRPr kumimoji="1" lang="ja-JP" altLang="en-US"/>
           </a:p>
@@ -1437,7 +1437,7 @@
           <a:p>
             <a:fld id="{12AC9B59-3BF3-4B80-B26E-7562A8BFA88C}" type="datetime1">
               <a:rPr kumimoji="1" lang="ja-JP" altLang="en-US" smtClean="0"/>
-              <a:t>2026/4/24</a:t>
+              <a:t>2026/4/30</a:t>
             </a:fld>
             <a:endParaRPr kumimoji="1" lang="ja-JP" altLang="en-US"/>
           </a:p>
@@ -1649,7 +1649,7 @@
           <a:p>
             <a:fld id="{7179E815-7981-4C74-AEC5-ED53767866CB}" type="datetime1">
               <a:rPr kumimoji="1" lang="ja-JP" altLang="en-US" smtClean="0"/>
-              <a:t>2026/4/24</a:t>
+              <a:t>2026/4/30</a:t>
             </a:fld>
             <a:endParaRPr kumimoji="1" lang="ja-JP" altLang="en-US"/>
           </a:p>
@@ -1851,7 +1851,7 @@
           <a:p>
             <a:fld id="{2354F063-2530-4F1C-AB5B-9D9DE17668FE}" type="datetime1">
               <a:rPr kumimoji="1" lang="ja-JP" altLang="en-US" smtClean="0"/>
-              <a:t>2026/4/24</a:t>
+              <a:t>2026/4/30</a:t>
             </a:fld>
             <a:endParaRPr kumimoji="1" lang="ja-JP" altLang="en-US"/>
           </a:p>
@@ -2100,7 +2100,7 @@
           <a:p>
             <a:fld id="{87494A9C-0BE6-426B-BA97-ED8EA34CDCEB}" type="datetime1">
               <a:rPr kumimoji="1" lang="ja-JP" altLang="en-US" smtClean="0"/>
-              <a:t>2026/4/24</a:t>
+              <a:t>2026/4/30</a:t>
             </a:fld>
             <a:endParaRPr kumimoji="1" lang="ja-JP" altLang="en-US"/>
           </a:p>
@@ -2396,7 +2396,7 @@
           <a:p>
             <a:fld id="{54D701CC-F81F-4FAE-8D03-865955CA638F}" type="datetime1">
               <a:rPr kumimoji="1" lang="ja-JP" altLang="en-US" smtClean="0"/>
-              <a:t>2026/4/24</a:t>
+              <a:t>2026/4/30</a:t>
             </a:fld>
             <a:endParaRPr kumimoji="1" lang="ja-JP" altLang="en-US"/>
           </a:p>
@@ -2827,7 +2827,7 @@
           <a:p>
             <a:fld id="{938D44DF-24CA-43E2-9093-3396243AA9AB}" type="datetime1">
               <a:rPr kumimoji="1" lang="ja-JP" altLang="en-US" smtClean="0"/>
-              <a:t>2026/4/24</a:t>
+              <a:t>2026/4/30</a:t>
             </a:fld>
             <a:endParaRPr kumimoji="1" lang="ja-JP" altLang="en-US"/>
           </a:p>
@@ -2945,7 +2945,7 @@
           <a:p>
             <a:fld id="{0BED3613-0D91-4125-A766-A2F45B449B2D}" type="datetime1">
               <a:rPr kumimoji="1" lang="ja-JP" altLang="en-US" smtClean="0"/>
-              <a:t>2026/4/24</a:t>
+              <a:t>2026/4/30</a:t>
             </a:fld>
             <a:endParaRPr kumimoji="1" lang="ja-JP" altLang="en-US"/>
           </a:p>
@@ -3040,7 +3040,7 @@
           <a:p>
             <a:fld id="{BCACBB27-9AAA-41C2-B253-2D106947EC5E}" type="datetime1">
               <a:rPr kumimoji="1" lang="ja-JP" altLang="en-US" smtClean="0"/>
-              <a:t>2026/4/24</a:t>
+              <a:t>2026/4/30</a:t>
             </a:fld>
             <a:endParaRPr kumimoji="1" lang="ja-JP" altLang="en-US"/>
           </a:p>
@@ -3349,7 +3349,7 @@
           <a:p>
             <a:fld id="{3B4D48FA-3FA4-474C-AE70-9A9080B18688}" type="datetime1">
               <a:rPr kumimoji="1" lang="ja-JP" altLang="en-US" smtClean="0"/>
-              <a:t>2026/4/24</a:t>
+              <a:t>2026/4/30</a:t>
             </a:fld>
             <a:endParaRPr kumimoji="1" lang="ja-JP" altLang="en-US"/>
           </a:p>
@@ -3606,7 +3606,7 @@
           <a:p>
             <a:fld id="{E2B450C2-176F-4CDC-A949-402CABB185D5}" type="datetime1">
               <a:rPr kumimoji="1" lang="ja-JP" altLang="en-US" smtClean="0"/>
-              <a:t>2026/4/24</a:t>
+              <a:t>2026/4/30</a:t>
             </a:fld>
             <a:endParaRPr kumimoji="1" lang="ja-JP" altLang="en-US"/>
           </a:p>
@@ -3851,7 +3851,7 @@
           <a:p>
             <a:fld id="{9E529F21-9341-413A-8868-D34EC7AB7037}" type="datetime1">
               <a:rPr kumimoji="1" lang="ja-JP" altLang="en-US" smtClean="0"/>
-              <a:t>2026/4/24</a:t>
+              <a:t>2026/4/30</a:t>
             </a:fld>
             <a:endParaRPr kumimoji="1" lang="ja-JP" altLang="en-US"/>
           </a:p>
@@ -8328,8 +8328,77 @@
                 <a:ea typeface="HGP創英角ｺﾞｼｯｸUB" panose="020B0900000000000000" pitchFamily="50" charset="-128"/>
                 <a:cs typeface="メイリオ" pitchFamily="50" charset="-128"/>
               </a:rPr>
-              <a:t>・通信プレイ</a:t>
-            </a:r>
+              <a:t>・コンポーネントパターンを使った設計</a:t>
+            </a:r>
+            <a:endParaRPr kumimoji="1" lang="en-US" altLang="ja-JP" sz="2400" dirty="0">
+              <a:solidFill>
+                <a:srgbClr val="000000"/>
+              </a:solidFill>
+              <a:latin typeface="HGP創英角ｺﾞｼｯｸUB" panose="020B0900000000000000" pitchFamily="50" charset="-128"/>
+              <a:ea typeface="HGP創英角ｺﾞｼｯｸUB" panose="020B0900000000000000" pitchFamily="50" charset="-128"/>
+              <a:cs typeface="メイリオ" pitchFamily="50" charset="-128"/>
+            </a:endParaRPr>
+          </a:p>
+          <a:p>
+            <a:pPr defTabSz="914400" fontAlgn="base">
+              <a:spcBef>
+                <a:spcPct val="0"/>
+              </a:spcBef>
+              <a:spcAft>
+                <a:spcPct val="0"/>
+              </a:spcAft>
+            </a:pPr>
+            <a:r>
+              <a:rPr kumimoji="1" lang="ja-JP" altLang="en-US" sz="2400" dirty="0">
+                <a:solidFill>
+                  <a:srgbClr val="000000"/>
+                </a:solidFill>
+                <a:latin typeface="HGP創英角ｺﾞｼｯｸUB" panose="020B0900000000000000" pitchFamily="50" charset="-128"/>
+                <a:ea typeface="HGP創英角ｺﾞｼｯｸUB" panose="020B0900000000000000" pitchFamily="50" charset="-128"/>
+                <a:cs typeface="メイリオ" pitchFamily="50" charset="-128"/>
+              </a:rPr>
+              <a:t>・</a:t>
+            </a:r>
+            <a:r>
+              <a:rPr kumimoji="1" lang="en-US" altLang="ja-JP" sz="2400" dirty="0">
+                <a:solidFill>
+                  <a:srgbClr val="000000"/>
+                </a:solidFill>
+                <a:latin typeface="HGP創英角ｺﾞｼｯｸUB" panose="020B0900000000000000" pitchFamily="50" charset="-128"/>
+                <a:ea typeface="HGP創英角ｺﾞｼｯｸUB" panose="020B0900000000000000" pitchFamily="50" charset="-128"/>
+                <a:cs typeface="メイリオ" pitchFamily="50" charset="-128"/>
+              </a:rPr>
+              <a:t>Wii</a:t>
+            </a:r>
+            <a:r>
+              <a:rPr kumimoji="1" lang="ja-JP" altLang="en-US" sz="2400" dirty="0">
+                <a:solidFill>
+                  <a:srgbClr val="000000"/>
+                </a:solidFill>
+                <a:latin typeface="HGP創英角ｺﾞｼｯｸUB" panose="020B0900000000000000" pitchFamily="50" charset="-128"/>
+                <a:ea typeface="HGP創英角ｺﾞｼｯｸUB" panose="020B0900000000000000" pitchFamily="50" charset="-128"/>
+                <a:cs typeface="メイリオ" pitchFamily="50" charset="-128"/>
+              </a:rPr>
+              <a:t>リモコンを組み込む</a:t>
+            </a:r>
+            <a:endParaRPr kumimoji="1" lang="en-US" altLang="ja-JP" sz="2400" dirty="0">
+              <a:solidFill>
+                <a:srgbClr val="000000"/>
+              </a:solidFill>
+              <a:latin typeface="HGP創英角ｺﾞｼｯｸUB" panose="020B0900000000000000" pitchFamily="50" charset="-128"/>
+              <a:ea typeface="HGP創英角ｺﾞｼｯｸUB" panose="020B0900000000000000" pitchFamily="50" charset="-128"/>
+              <a:cs typeface="メイリオ" pitchFamily="50" charset="-128"/>
+            </a:endParaRPr>
+          </a:p>
+          <a:p>
+            <a:pPr defTabSz="914400" fontAlgn="base">
+              <a:spcBef>
+                <a:spcPct val="0"/>
+              </a:spcBef>
+              <a:spcAft>
+                <a:spcPct val="0"/>
+              </a:spcAft>
+            </a:pPr>
             <a:endParaRPr kumimoji="1" lang="en-US" altLang="ja-JP" sz="2400" dirty="0">
               <a:solidFill>
                 <a:srgbClr val="000000"/>
@@ -8441,10 +8510,28 @@
                 <a:ea typeface="HGP創英角ｺﾞｼｯｸUB" panose="020B0900000000000000" pitchFamily="50" charset="-128"/>
                 <a:cs typeface="メイリオ" pitchFamily="50" charset="-128"/>
               </a:rPr>
-              <a:t>・</a:t>
-            </a:r>
-            <a:r>
-              <a:rPr kumimoji="1" lang="en-US" altLang="ja-JP" sz="2400" dirty="0">
+              <a:t>・通信プレイ</a:t>
+            </a:r>
+            <a:endParaRPr kumimoji="1" lang="en-US" altLang="ja-JP" sz="2400" dirty="0">
+              <a:solidFill>
+                <a:srgbClr val="000000"/>
+              </a:solidFill>
+              <a:latin typeface="HGP創英角ｺﾞｼｯｸUB" panose="020B0900000000000000" pitchFamily="50" charset="-128"/>
+              <a:ea typeface="HGP創英角ｺﾞｼｯｸUB" panose="020B0900000000000000" pitchFamily="50" charset="-128"/>
+              <a:cs typeface="メイリオ" pitchFamily="50" charset="-128"/>
+            </a:endParaRPr>
+          </a:p>
+          <a:p>
+            <a:pPr defTabSz="914400" fontAlgn="base">
+              <a:spcBef>
+                <a:spcPct val="0"/>
+              </a:spcBef>
+              <a:spcAft>
+                <a:spcPct val="0"/>
+              </a:spcAft>
+            </a:pPr>
+            <a:r>
+              <a:rPr kumimoji="1" lang="ja-JP" altLang="en-US" sz="2400">
                 <a:solidFill>
                   <a:srgbClr val="000000"/>
                 </a:solidFill>
@@ -8452,18 +8539,7 @@
                 <a:ea typeface="HGP創英角ｺﾞｼｯｸUB" panose="020B0900000000000000" pitchFamily="50" charset="-128"/>
                 <a:cs typeface="メイリオ" pitchFamily="50" charset="-128"/>
               </a:rPr>
-              <a:t>IP</a:t>
-            </a:r>
-            <a:r>
-              <a:rPr kumimoji="1" lang="ja-JP" altLang="en-US" sz="2400" dirty="0">
-                <a:solidFill>
-                  <a:srgbClr val="000000"/>
-                </a:solidFill>
-                <a:latin typeface="HGP創英角ｺﾞｼｯｸUB" panose="020B0900000000000000" pitchFamily="50" charset="-128"/>
-                <a:ea typeface="HGP創英角ｺﾞｼｯｸUB" panose="020B0900000000000000" pitchFamily="50" charset="-128"/>
-                <a:cs typeface="メイリオ" pitchFamily="50" charset="-128"/>
-              </a:rPr>
-              <a:t>アドレスを使った通信プレイ</a:t>
+              <a:t>・赤外線を使ったチャンバラ</a:t>
             </a:r>
             <a:endParaRPr kumimoji="1" lang="en-US" altLang="ja-JP" sz="2400" dirty="0">
               <a:solidFill>
@@ -9339,14 +9415,12 @@
 </file>
 
 <file path=customXml/item1.xml><?xml version="1.0" encoding="utf-8"?>
-<p:properties xmlns:p="http://schemas.microsoft.com/office/2006/metadata/properties" xmlns:xsi="http://www.w3.org/2001/XMLSchema-instance" xmlns:pc="http://schemas.microsoft.com/office/infopath/2007/PartnerControls">
-  <documentManagement>
-    <TaxCatchAll xmlns="f9048785-d070-4c78-8f2f-ed2b48eb345c" xsi:nil="true"/>
-    <lcf76f155ced4ddcb4097134ff3c332f xmlns="02709b60-37ec-424b-b681-c6612ac7fe32">
-      <Terms xmlns="http://schemas.microsoft.com/office/infopath/2007/PartnerControls"/>
-    </lcf76f155ced4ddcb4097134ff3c332f>
-  </documentManagement>
-</p:properties>
+<?mso-contentType ?>
+<FormTemplates xmlns="http://schemas.microsoft.com/sharepoint/v3/contenttype/forms">
+  <Display>DocumentLibraryForm</Display>
+  <Edit>DocumentLibraryForm</Edit>
+  <New>DocumentLibraryForm</New>
+</FormTemplates>
 </file>
 
 <file path=customXml/item2.xml><?xml version="1.0" encoding="utf-8"?>
@@ -9585,29 +9659,20 @@
 </file>
 
 <file path=customXml/item3.xml><?xml version="1.0" encoding="utf-8"?>
-<?mso-contentType ?>
-<FormTemplates xmlns="http://schemas.microsoft.com/sharepoint/v3/contenttype/forms">
-  <Display>DocumentLibraryForm</Display>
-  <Edit>DocumentLibraryForm</Edit>
-  <New>DocumentLibraryForm</New>
-</FormTemplates>
+<p:properties xmlns:p="http://schemas.microsoft.com/office/2006/metadata/properties" xmlns:xsi="http://www.w3.org/2001/XMLSchema-instance" xmlns:pc="http://schemas.microsoft.com/office/infopath/2007/PartnerControls">
+  <documentManagement>
+    <TaxCatchAll xmlns="f9048785-d070-4c78-8f2f-ed2b48eb345c" xsi:nil="true"/>
+    <lcf76f155ced4ddcb4097134ff3c332f xmlns="02709b60-37ec-424b-b681-c6612ac7fe32">
+      <Terms xmlns="http://schemas.microsoft.com/office/infopath/2007/PartnerControls"/>
+    </lcf76f155ced4ddcb4097134ff3c332f>
+  </documentManagement>
+</p:properties>
 </file>
 
 <file path=customXml/itemProps1.xml><?xml version="1.0" encoding="utf-8"?>
-<ds:datastoreItem xmlns:ds="http://schemas.openxmlformats.org/officeDocument/2006/customXml" ds:itemID="{049CE55E-098B-4E48-AF86-E65EA21E3ADA}">
+<ds:datastoreItem xmlns:ds="http://schemas.openxmlformats.org/officeDocument/2006/customXml" ds:itemID="{7548941E-71E2-4531-BC0F-EE0D630B2ABC}">
   <ds:schemaRefs>
-    <ds:schemaRef ds:uri="0c73c1f5-50cd-4477-a315-44bef7b8a847"/>
-    <ds:schemaRef ds:uri="aaa52e1c-8772-4366-aa63-bf636c80ebd4"/>
-    <ds:schemaRef ds:uri="http://purl.org/dc/dcmitype/"/>
-    <ds:schemaRef ds:uri="http://purl.org/dc/elements/1.1/"/>
-    <ds:schemaRef ds:uri="http://purl.org/dc/terms/"/>
-    <ds:schemaRef ds:uri="http://schemas.microsoft.com/office/2006/documentManagement/types"/>
-    <ds:schemaRef ds:uri="http://schemas.microsoft.com/office/2006/metadata/properties"/>
-    <ds:schemaRef ds:uri="http://schemas.microsoft.com/office/infopath/2007/PartnerControls"/>
-    <ds:schemaRef ds:uri="http://schemas.openxmlformats.org/package/2006/metadata/core-properties"/>
-    <ds:schemaRef ds:uri="http://www.w3.org/XML/1998/namespace"/>
-    <ds:schemaRef ds:uri="f9048785-d070-4c78-8f2f-ed2b48eb345c"/>
-    <ds:schemaRef ds:uri="02709b60-37ec-424b-b681-c6612ac7fe32"/>
+    <ds:schemaRef ds:uri="http://schemas.microsoft.com/sharepoint/v3/contenttype/forms"/>
   </ds:schemaRefs>
 </ds:datastoreItem>
 </file>
@@ -9632,9 +9697,20 @@
 </file>
 
 <file path=customXml/itemProps3.xml><?xml version="1.0" encoding="utf-8"?>
-<ds:datastoreItem xmlns:ds="http://schemas.openxmlformats.org/officeDocument/2006/customXml" ds:itemID="{7548941E-71E2-4531-BC0F-EE0D630B2ABC}">
+<ds:datastoreItem xmlns:ds="http://schemas.openxmlformats.org/officeDocument/2006/customXml" ds:itemID="{049CE55E-098B-4E48-AF86-E65EA21E3ADA}">
   <ds:schemaRefs>
-    <ds:schemaRef ds:uri="http://schemas.microsoft.com/sharepoint/v3/contenttype/forms"/>
+    <ds:schemaRef ds:uri="0c73c1f5-50cd-4477-a315-44bef7b8a847"/>
+    <ds:schemaRef ds:uri="aaa52e1c-8772-4366-aa63-bf636c80ebd4"/>
+    <ds:schemaRef ds:uri="http://purl.org/dc/dcmitype/"/>
+    <ds:schemaRef ds:uri="http://purl.org/dc/elements/1.1/"/>
+    <ds:schemaRef ds:uri="http://purl.org/dc/terms/"/>
+    <ds:schemaRef ds:uri="http://schemas.microsoft.com/office/2006/documentManagement/types"/>
+    <ds:schemaRef ds:uri="http://schemas.microsoft.com/office/2006/metadata/properties"/>
+    <ds:schemaRef ds:uri="http://schemas.microsoft.com/office/infopath/2007/PartnerControls"/>
+    <ds:schemaRef ds:uri="http://schemas.openxmlformats.org/package/2006/metadata/core-properties"/>
+    <ds:schemaRef ds:uri="http://www.w3.org/XML/1998/namespace"/>
+    <ds:schemaRef ds:uri="f9048785-d070-4c78-8f2f-ed2b48eb345c"/>
+    <ds:schemaRef ds:uri="02709b60-37ec-424b-b681-c6612ac7fe32"/>
   </ds:schemaRefs>
 </ds:datastoreItem>
 </file>